--- a/index/designs/y7-l12/l2-how-question-vehicles/l2-how-question-vehicles.pptx
+++ b/index/designs/y7-l12/l2-how-question-vehicles/l2-how-question-vehicles.pptx
@@ -1937,15 +1937,6 @@
               </a:rPr>
               <a:t>你怎么上学</a:t>
             </a:r>
-            <a:pPr algn="ctr" indent="0" marL="0">
-              <a:lnSpc>
-                <a:spcPts val="6380"/>
-              </a:lnSpc>
-              <a:spcAft>
-                <a:spcPts val="1000"/>
-              </a:spcAft>
-              <a:buNone/>
-            </a:pPr>
             <a:r>
               <a:rPr lang="en-US" sz="5800" b="1" dirty="0">
                 <a:solidFill>
@@ -3816,12 +3807,6 @@
               </a:rPr>
               <a:t>On whiteboards: write </a:t>
             </a:r>
-            <a:pPr algn="l" indent="0" marL="0">
-              <a:lnSpc>
-                <a:spcPts val="1540"/>
-              </a:lnSpc>
-              <a:buNone/>
-            </a:pPr>
             <a:r>
               <a:rPr lang="en-US" sz="1100" b="1" dirty="0">
                 <a:solidFill>
@@ -3833,12 +3818,6 @@
               </a:rPr>
               <a:t>怎么</a:t>
             </a:r>
-            <a:pPr algn="l" indent="0" marL="0">
-              <a:lnSpc>
-                <a:spcPts val="1540"/>
-              </a:lnSpc>
-              <a:buNone/>
-            </a:pPr>
             <a:r>
               <a:rPr lang="en-US" sz="1100" dirty="0">
                 <a:solidFill>
@@ -3970,12 +3949,6 @@
               </a:rPr>
               <a:t>Translate: </a:t>
             </a:r>
-            <a:pPr algn="l" indent="0" marL="0">
-              <a:lnSpc>
-                <a:spcPts val="1690"/>
-              </a:lnSpc>
-              <a:buNone/>
-            </a:pPr>
             <a:r>
               <a:rPr lang="en-US" sz="1300" b="1" dirty="0">
                 <a:solidFill>
@@ -4571,12 +4544,6 @@
               </a:rPr>
               <a:t>Today: </a:t>
             </a:r>
-            <a:pPr algn="ctr" indent="0" marL="0">
-              <a:spcBef>
-                <a:spcPts val="800"/>
-              </a:spcBef>
-              <a:buNone/>
-            </a:pPr>
             <a:r>
               <a:rPr lang="en-US" sz="1100" b="1" dirty="0">
                 <a:solidFill>
@@ -4588,12 +4555,6 @@
               </a:rPr>
               <a:t>怎么</a:t>
             </a:r>
-            <a:pPr algn="ctr" indent="0" marL="0">
-              <a:spcBef>
-                <a:spcPts val="800"/>
-              </a:spcBef>
-              <a:buNone/>
-            </a:pPr>
             <a:r>
               <a:rPr lang="en-US" sz="1100" dirty="0">
                 <a:solidFill>
@@ -4605,12 +4566,6 @@
               </a:rPr>
               <a:t> = how (asking about method) · </a:t>
             </a:r>
-            <a:pPr algn="ctr" indent="0" marL="0">
-              <a:spcBef>
-                <a:spcPts val="800"/>
-              </a:spcBef>
-              <a:buNone/>
-            </a:pPr>
             <a:r>
               <a:rPr lang="en-US" sz="1100" b="1" dirty="0">
                 <a:solidFill>
@@ -4622,12 +4577,6 @@
               </a:rPr>
               <a:t>火车/出租车/公共汽车/地铁</a:t>
             </a:r>
-            <a:pPr algn="ctr" indent="0" marL="0">
-              <a:spcBef>
-                <a:spcPts val="800"/>
-              </a:spcBef>
-              <a:buNone/>
-            </a:pPr>
             <a:r>
               <a:rPr lang="en-US" sz="1100" dirty="0">
                 <a:solidFill>
@@ -6584,12 +6533,6 @@
               </a:rPr>
               <a:t>You can already say how your family travels. Today we learn to ASK the question — </a:t>
             </a:r>
-            <a:pPr algn="l" indent="0" marL="0">
-              <a:lnSpc>
-                <a:spcPts val="1400"/>
-              </a:lnSpc>
-              <a:buNone/>
-            </a:pPr>
             <a:r>
               <a:rPr lang="en-US" sz="1000" b="1" dirty="0">
                 <a:solidFill>
@@ -6601,12 +6544,6 @@
               </a:rPr>
               <a:t>怎么</a:t>
             </a:r>
-            <a:pPr algn="l" indent="0" marL="0">
-              <a:lnSpc>
-                <a:spcPts val="1400"/>
-              </a:lnSpc>
-              <a:buNone/>
-            </a:pPr>
             <a:r>
               <a:rPr lang="en-US" sz="1000" dirty="0">
                 <a:solidFill>
@@ -7088,9 +7025,6 @@
               </a:rPr>
               <a:t>We are learning to ask and answer </a:t>
             </a:r>
-            <a:pPr algn="l" indent="0" marL="0">
-              <a:buNone/>
-            </a:pPr>
             <a:r>
               <a:rPr lang="en-US" sz="1400" b="1" dirty="0">
                 <a:solidFill>
@@ -7102,9 +7036,6 @@
               </a:rPr>
               <a:t>how someone travels</a:t>
             </a:r>
-            <a:pPr algn="l" indent="0" marL="0">
-              <a:buNone/>
-            </a:pPr>
             <a:r>
               <a:rPr lang="en-US" sz="1400" dirty="0">
                 <a:solidFill>
@@ -7228,9 +7159,6 @@
               </a:rPr>
               <a:t>I can ask </a:t>
             </a:r>
-            <a:pPr algn="l" indent="0" marL="0">
-              <a:buNone/>
-            </a:pPr>
             <a:r>
               <a:rPr lang="en-US" sz="1300" b="1" dirty="0">
                 <a:solidFill>
@@ -7393,9 +7321,6 @@
               </a:rPr>
               <a:t>I can say the words for </a:t>
             </a:r>
-            <a:pPr algn="l" indent="0" marL="0">
-              <a:buNone/>
-            </a:pPr>
             <a:r>
               <a:rPr lang="en-US" sz="1300" b="1" dirty="0">
                 <a:solidFill>
@@ -7407,9 +7332,6 @@
               </a:rPr>
               <a:t>train, taxi, public bus and subway</a:t>
             </a:r>
-            <a:pPr algn="l" indent="0" marL="0">
-              <a:buNone/>
-            </a:pPr>
             <a:r>
               <a:rPr lang="en-US" sz="1300" dirty="0">
                 <a:solidFill>
@@ -7572,9 +7494,6 @@
               </a:rPr>
               <a:t>I can answer using </a:t>
             </a:r>
-            <a:pPr algn="l" indent="0" marL="0">
-              <a:buNone/>
-            </a:pPr>
             <a:r>
               <a:rPr lang="en-US" sz="1300" b="1" dirty="0">
                 <a:solidFill>
@@ -7586,9 +7505,6 @@
               </a:rPr>
               <a:t>坐 + the correct vehicle</a:t>
             </a:r>
-            <a:pPr algn="l" indent="0" marL="0">
-              <a:buNone/>
-            </a:pPr>
             <a:r>
               <a:rPr lang="en-US" sz="1300" dirty="0">
                 <a:solidFill>
@@ -11430,9 +11346,6 @@
               </a:rPr>
               <a:t>铁(鐵) and 地铁 both contain the </a:t>
             </a:r>
-            <a:pPr algn="l" indent="0" marL="0">
-              <a:buNone/>
-            </a:pPr>
             <a:r>
               <a:rPr lang="en-US" sz="850" b="1" dirty="0">
                 <a:solidFill>
@@ -11444,9 +11357,6 @@
               </a:rPr>
               <a:t>钅(metal) radical</a:t>
             </a:r>
-            <a:pPr algn="l" indent="0" marL="0">
-              <a:buNone/>
-            </a:pPr>
             <a:r>
               <a:rPr lang="en-US" sz="850" dirty="0">
                 <a:solidFill>
@@ -11904,9 +11814,6 @@
               </a:rPr>
               <a:t>你</a:t>
             </a:r>
-            <a:pPr algn="l" indent="0" marL="0">
-              <a:buNone/>
-            </a:pPr>
             <a:r>
               <a:rPr lang="en-US" sz="1400" b="1" dirty="0">
                 <a:solidFill>
@@ -11918,9 +11825,6 @@
               </a:rPr>
               <a:t>爸爸</a:t>
             </a:r>
-            <a:pPr algn="l" indent="0" marL="0">
-              <a:buNone/>
-            </a:pPr>
             <a:r>
               <a:rPr lang="en-US" sz="1400" dirty="0">
                 <a:solidFill>
@@ -12111,9 +12015,6 @@
               </a:rPr>
               <a:t>你</a:t>
             </a:r>
-            <a:pPr algn="l" indent="0" marL="0">
-              <a:buNone/>
-            </a:pPr>
             <a:r>
               <a:rPr lang="en-US" sz="1400" b="1" dirty="0">
                 <a:solidFill>
@@ -12125,9 +12026,6 @@
               </a:rPr>
               <a:t>妈妈</a:t>
             </a:r>
-            <a:pPr algn="l" indent="0" marL="0">
-              <a:buNone/>
-            </a:pPr>
             <a:r>
               <a:rPr lang="en-US" sz="1400" dirty="0">
                 <a:solidFill>
@@ -12318,9 +12216,6 @@
               </a:rPr>
               <a:t>你</a:t>
             </a:r>
-            <a:pPr algn="l" indent="0" marL="0">
-              <a:buNone/>
-            </a:pPr>
             <a:r>
               <a:rPr lang="en-US" sz="1400" b="1" dirty="0">
                 <a:solidFill>
@@ -12332,9 +12227,6 @@
               </a:rPr>
               <a:t>哥哥</a:t>
             </a:r>
-            <a:pPr algn="l" indent="0" marL="0">
-              <a:buNone/>
-            </a:pPr>
             <a:r>
               <a:rPr lang="en-US" sz="1400" dirty="0">
                 <a:solidFill>
@@ -12665,9 +12557,6 @@
               </a:rPr>
               <a:t>你 </a:t>
             </a:r>
-            <a:pPr algn="l" indent="0" marL="0">
-              <a:buNone/>
-            </a:pPr>
             <a:r>
               <a:rPr lang="en-US" sz="1500" b="1" dirty="0">
                 <a:solidFill>
@@ -12679,9 +12568,6 @@
               </a:rPr>
               <a:t>___</a:t>
             </a:r>
-            <a:pPr algn="l" indent="0" marL="0">
-              <a:buNone/>
-            </a:pPr>
             <a:r>
               <a:rPr lang="en-US" sz="1500" dirty="0">
                 <a:solidFill>
@@ -12693,9 +12579,6 @@
               </a:rPr>
               <a:t> 怎么 </a:t>
             </a:r>
-            <a:pPr algn="l" indent="0" marL="0">
-              <a:buNone/>
-            </a:pPr>
             <a:r>
               <a:rPr lang="en-US" sz="1500" b="1" dirty="0">
                 <a:solidFill>
@@ -12707,9 +12590,6 @@
               </a:rPr>
               <a:t>___</a:t>
             </a:r>
-            <a:pPr algn="l" indent="0" marL="0">
-              <a:buNone/>
-            </a:pPr>
             <a:r>
               <a:rPr lang="en-US" sz="1500" dirty="0">
                 <a:solidFill>
@@ -12721,9 +12601,6 @@
               </a:rPr>
               <a:t>？坐 </a:t>
             </a:r>
-            <a:pPr algn="l" indent="0" marL="0">
-              <a:buNone/>
-            </a:pPr>
             <a:r>
               <a:rPr lang="en-US" sz="1500" b="1" dirty="0">
                 <a:solidFill>
@@ -12735,9 +12612,6 @@
               </a:rPr>
               <a:t>___</a:t>
             </a:r>
-            <a:pPr algn="l" indent="0" marL="0">
-              <a:buNone/>
-            </a:pPr>
             <a:r>
               <a:rPr lang="en-US" sz="1500" dirty="0">
                 <a:solidFill>
@@ -13234,9 +13108,6 @@
               </a:rPr>
               <a:t>「怎么」asks about what? </a:t>
             </a:r>
-            <a:pPr algn="l" indent="0" marL="0">
-              <a:buNone/>
-            </a:pPr>
             <a:r>
               <a:rPr lang="en-US" sz="1300" b="1" dirty="0">
                 <a:solidFill>
@@ -13358,9 +13229,6 @@
               </a:rPr>
               <a:t>How do you say </a:t>
             </a:r>
-            <a:pPr algn="l" indent="0" marL="0">
-              <a:buNone/>
-            </a:pPr>
             <a:r>
               <a:rPr lang="en-US" sz="1300" b="1" dirty="0">
                 <a:solidFill>
@@ -13372,9 +13240,6 @@
               </a:rPr>
               <a:t>"How do you get to school?"</a:t>
             </a:r>
-            <a:pPr algn="l" indent="0" marL="0">
-              <a:buNone/>
-            </a:pPr>
             <a:r>
               <a:rPr lang="en-US" sz="1300" dirty="0">
                 <a:solidFill>
@@ -14427,12 +14292,26 @@
               </a:rPr>
               <a:t>Q3 — What's wrong with 「你上学怎么？」?</a:t>
             </a:r>
+            <a:endParaRPr lang="en-US" sz="1100" dirty="0"/>
+          </a:p>
+          <a:p>
             <a:pPr algn="l" indent="0" marL="0">
               <a:lnSpc>
                 <a:spcPts val="1540"/>
               </a:lnSpc>
               <a:buNone/>
             </a:pPr>
+            <a:r>
+              <a:rPr lang="en-US" sz="1100" dirty="0">
+                <a:solidFill>
+                  <a:srgbClr val="1E2A38"/>
+                </a:solidFill>
+                <a:latin typeface="Noto Sans SC" pitchFamily="34" charset="0"/>
+                <a:ea typeface="Noto Sans SC" pitchFamily="34" charset="-122"/>
+                <a:cs typeface="Noto Sans SC" pitchFamily="34" charset="-120"/>
+              </a:rPr>
+              <a:t>Word order: </a:t>
+            </a:r>
             <a:endParaRPr lang="en-US" sz="1100" dirty="0"/>
           </a:p>
           <a:p>
@@ -14443,6 +14322,17 @@
               <a:buNone/>
             </a:pPr>
             <a:r>
+              <a:rPr lang="en-US" sz="1100" b="1" dirty="0">
+                <a:solidFill>
+                  <a:srgbClr val="1E2A38"/>
+                </a:solidFill>
+                <a:latin typeface="Noto Sans SC" pitchFamily="34" charset="0"/>
+                <a:ea typeface="Noto Sans SC" pitchFamily="34" charset="-122"/>
+                <a:cs typeface="Noto Sans SC" pitchFamily="34" charset="-120"/>
+              </a:rPr>
+              <a:t>怎么 must come before the verb phrase</a:t>
+            </a:r>
+            <a:r>
               <a:rPr lang="en-US" sz="1100" dirty="0">
                 <a:solidFill>
                   <a:srgbClr val="1E2A38"/>
@@ -14451,51 +14341,8 @@
                 <a:ea typeface="Noto Sans SC" pitchFamily="34" charset="-122"/>
                 <a:cs typeface="Noto Sans SC" pitchFamily="34" charset="-120"/>
               </a:rPr>
-              <a:t>Word order: </a:t>
-            </a:r>
-            <a:endParaRPr lang="en-US" sz="1100" dirty="0"/>
-          </a:p>
-          <a:p>
-            <a:pPr algn="l" indent="0" marL="0">
-              <a:lnSpc>
-                <a:spcPts val="1540"/>
-              </a:lnSpc>
-              <a:buNone/>
-            </a:pPr>
-            <a:r>
-              <a:rPr lang="en-US" sz="1100" b="1" dirty="0">
-                <a:solidFill>
-                  <a:srgbClr val="1E2A38"/>
-                </a:solidFill>
-                <a:latin typeface="Noto Sans SC" pitchFamily="34" charset="0"/>
-                <a:ea typeface="Noto Sans SC" pitchFamily="34" charset="-122"/>
-                <a:cs typeface="Noto Sans SC" pitchFamily="34" charset="-120"/>
-              </a:rPr>
-              <a:t>怎么 must come before the verb phrase</a:t>
-            </a:r>
-            <a:pPr algn="l" indent="0" marL="0">
-              <a:lnSpc>
-                <a:spcPts val="1540"/>
-              </a:lnSpc>
-              <a:buNone/>
-            </a:pPr>
-            <a:r>
-              <a:rPr lang="en-US" sz="1100" dirty="0">
-                <a:solidFill>
-                  <a:srgbClr val="1E2A38"/>
-                </a:solidFill>
-                <a:latin typeface="Noto Sans SC" pitchFamily="34" charset="0"/>
-                <a:ea typeface="Noto Sans SC" pitchFamily="34" charset="-122"/>
-                <a:cs typeface="Noto Sans SC" pitchFamily="34" charset="-120"/>
-              </a:rPr>
               <a:t>, not after it. The correct order is </a:t>
             </a:r>
-            <a:pPr algn="l" indent="0" marL="0">
-              <a:lnSpc>
-                <a:spcPts val="1540"/>
-              </a:lnSpc>
-              <a:buNone/>
-            </a:pPr>
             <a:r>
               <a:rPr lang="en-US" sz="1100" b="1" dirty="0">
                 <a:solidFill>
@@ -15652,9 +15499,6 @@
               </a:rPr>
               <a:t>你 </a:t>
             </a:r>
-            <a:pPr algn="l" indent="0" marL="0">
-              <a:buNone/>
-            </a:pPr>
             <a:r>
               <a:rPr lang="en-US" sz="1200" b="1" dirty="0">
                 <a:solidFill>
@@ -15666,9 +15510,6 @@
               </a:rPr>
               <a:t>___</a:t>
             </a:r>
-            <a:pPr algn="l" indent="0" marL="0">
-              <a:buNone/>
-            </a:pPr>
             <a:r>
               <a:rPr lang="en-US" sz="1200" dirty="0">
                 <a:solidFill>
@@ -15680,9 +15521,6 @@
               </a:rPr>
               <a:t> 怎么 </a:t>
             </a:r>
-            <a:pPr algn="l" indent="0" marL="0">
-              <a:buNone/>
-            </a:pPr>
             <a:r>
               <a:rPr lang="en-US" sz="1200" b="1" dirty="0">
                 <a:solidFill>
@@ -15694,9 +15532,6 @@
               </a:rPr>
               <a:t>___</a:t>
             </a:r>
-            <a:pPr algn="l" indent="0" marL="0">
-              <a:buNone/>
-            </a:pPr>
             <a:r>
               <a:rPr lang="en-US" sz="1200" dirty="0">
                 <a:solidFill>
@@ -15708,9 +15543,6 @@
               </a:rPr>
               <a:t>？坐 </a:t>
             </a:r>
-            <a:pPr algn="l" indent="0" marL="0">
-              <a:buNone/>
-            </a:pPr>
             <a:r>
               <a:rPr lang="en-US" sz="1200" b="1" dirty="0">
                 <a:solidFill>
@@ -15722,9 +15554,6 @@
               </a:rPr>
               <a:t>___</a:t>
             </a:r>
-            <a:pPr algn="l" indent="0" marL="0">
-              <a:buNone/>
-            </a:pPr>
             <a:r>
               <a:rPr lang="en-US" sz="1200" dirty="0">
                 <a:solidFill>
